--- a/docs/MANUAL_DO_UTILIZADOR.pptx
+++ b/docs/MANUAL_DO_UTILIZADOR.pptx
@@ -17515,7 +17515,7 @@
                 <a:ea typeface="Calibri" pitchFamily="34" charset="-122"/>
                 <a:cs typeface="Calibri" pitchFamily="34" charset="-120"/>
               </a:rPr>
-              <a:t>Documentos — peças vinculadas ao processo.</a:t>
+              <a:t>Documentos — peças do processo, com versionamento (v1/v2).</a:t>
             </a:r>
             <a:endParaRPr lang="en-US" sz="1000" dirty="0"/>
           </a:p>
@@ -17596,7 +17596,7 @@
                 <a:ea typeface="Calibri" pitchFamily="34" charset="-122"/>
                 <a:cs typeface="Calibri" pitchFamily="34" charset="-120"/>
               </a:rPr>
-              <a:t>Arquivo das peças vinculadas: procurações, certidões e comprovativos. A lista surge vazia enquanto nada tiver sido carregado.</a:t>
+              <a:t>Peças, procurações e comprovativos, com tipo, confidencialidade, versão e tamanho.</a:t>
             </a:r>
             <a:endParaRPr lang="en-US" sz="1100" dirty="0"/>
           </a:p>

--- a/docs/MANUAL_DO_UTILIZADOR.pptx
+++ b/docs/MANUAL_DO_UTILIZADOR.pptx
@@ -542,7 +542,7 @@
           <a:p>
             <a:r>
               <a:rPr lang="en-US" dirty="0"/>
-              <a:t>Capa. Manual do Utilizador da Plataforma Jurídica ALCv, versão 1.0, Setembro de 2026.</a:t>
+              <a:t>Capa. Manual do Utilizador da Plataforma Jurídica LexCV, versão 1.0, Setembro de 2026.</a:t>
             </a:r>
             <a:endParaRPr lang="en-US" dirty="0"/>
           </a:p>
@@ -4518,7 +4518,7 @@
                 <a:ea typeface="Calibri" pitchFamily="34" charset="-122"/>
                 <a:cs typeface="Calibri" pitchFamily="34" charset="-120"/>
               </a:rPr>
-              <a:t>ALCv</a:t>
+              <a:t>LexCV</a:t>
             </a:r>
             <a:endParaRPr lang="en-US" sz="1500" dirty="0"/>
           </a:p>
@@ -27932,7 +27932,7 @@
                 <a:ea typeface="Calibri" pitchFamily="34" charset="-122"/>
                 <a:cs typeface="Calibri" pitchFamily="34" charset="-120"/>
               </a:rPr>
-              <a:t>O ALCv é uma plataforma integrada de gestão forense desenhada para a realidade de Cabo Verde, cobrindo a tramitação nos tribunais de comarca, tribunais de relação e Supremo Tribunal de Justiça.</a:t>
+              <a:t>O LexCV é uma plataforma integrada de gestão forense desenhada para a realidade de Cabo Verde, cobrindo a tramitação nos tribunais de comarca, tribunais de relação e Supremo Tribunal de Justiça.</a:t>
             </a:r>
             <a:endParaRPr lang="en-US" sz="1300" dirty="0"/>
           </a:p>
@@ -30685,7 +30685,7 @@
                 <a:ea typeface="Calibri" pitchFamily="34" charset="-122"/>
                 <a:cs typeface="Calibri" pitchFamily="34" charset="-120"/>
               </a:rPr>
-              <a:t>ALCv · www.alcv.tech</a:t>
+              <a:t>LexCV · www.alcv.tech</a:t>
             </a:r>
             <a:endParaRPr lang="en-US" sz="1200" dirty="0"/>
           </a:p>
@@ -30724,7 +30724,7 @@
                 <a:ea typeface="Calibri" pitchFamily="34" charset="-122"/>
                 <a:cs typeface="Calibri" pitchFamily="34" charset="-120"/>
               </a:rPr>
-              <a:t>© 2026 ALCv. Todos os direitos reservados.</a:t>
+              <a:t>© 2026 LexCV. Todos os direitos reservados.</a:t>
             </a:r>
             <a:endParaRPr lang="en-US" sz="1050" dirty="0"/>
           </a:p>
@@ -31371,7 +31371,7 @@
                 <a:ea typeface="Calibri" pitchFamily="34" charset="-122"/>
                 <a:cs typeface="Calibri" pitchFamily="34" charset="-120"/>
               </a:rPr>
-              <a:t>Utilizador: admin@alcv.cv</a:t>
+              <a:t>Utilizador: admin@lexcv.cv</a:t>
             </a:r>
             <a:endParaRPr lang="en-US" sz="1150" dirty="0"/>
           </a:p>
